--- a/classes/parte-12-osint-e-ingenieria-social/259-defensa-contra-la-ingenieria-social/clase-259-presentacion.pptx
+++ b/classes/parte-12-osint-e-ingenieria-social/259-defensa-contra-la-ingenieria-social/clase-259-presentacion.pptx
@@ -17,6 +17,10 @@
     <p:sldId id="265" r:id="rId16"/>
     <p:sldId id="266" r:id="rId17"/>
     <p:sldId id="267" r:id="rId18"/>
+    <p:sldId id="268" r:id="rId19"/>
+    <p:sldId id="269" r:id="rId20"/>
+    <p:sldId id="270" r:id="rId21"/>
+    <p:sldId id="271" r:id="rId22"/>
   </p:sldIdLst>
   <p:sldSz cx="9144000" cy="6858000" type="screen4x3"/>
   <p:notesSz cx="6858000" cy="9144000"/>
@@ -3198,7 +3202,7 @@
                   <a:srgbClr val="0B3D2E"/>
                 </a:solidFill>
               </a:rPr>
-              <a:t>⚠️ Errores comunes</a:t>
+              <a:t>🧪 Laboratorio guiado (ejercicio aplicado)</a:t>
             </a:r>
           </a:p>
         </p:txBody>
@@ -3236,67 +3240,97 @@
                   <a:srgbClr val="22282E"/>
                 </a:solidFill>
               </a:rPr>
-              <a:t>•  DMARC rompe correo legítimo — Se pasó a reject sin monitorizar. Empieza en p=none, analiza y sube gradualmente.</a:t>
-            </a:r>
-          </a:p>
-          <a:p>
-            <a:pPr>
-              <a:spcAft>
-                <a:spcPts val="600"/>
-              </a:spcAft>
-            </a:pPr>
-            <a:r>
-              <a:rPr sz="1500">
-                <a:solidFill>
-                  <a:srgbClr val="22282E"/>
-                </a:solidFill>
-              </a:rPr>
-              <a:t>•  MFA por SMS eludido — Vulnerable a AiTM/SIM swap. Migra a FIDO2/passkeys.</a:t>
-            </a:r>
-          </a:p>
-          <a:p>
-            <a:pPr>
-              <a:spcAft>
-                <a:spcPts val="600"/>
-              </a:spcAft>
-            </a:pPr>
-            <a:r>
-              <a:rPr sz="1500">
-                <a:solidFill>
-                  <a:srgbClr val="22282E"/>
-                </a:solidFill>
-              </a:rPr>
-              <a:t>•  Usuarios no reportan — No hay botón o hay miedo a represalias. Facilita el reporte y refuerza positivamente.</a:t>
-            </a:r>
-          </a:p>
-          <a:p>
-            <a:pPr>
-              <a:spcAft>
-                <a:spcPts val="600"/>
-              </a:spcAft>
-            </a:pPr>
-            <a:r>
-              <a:rPr sz="1500">
-                <a:solidFill>
-                  <a:srgbClr val="22282E"/>
-                </a:solidFill>
-              </a:rPr>
-              <a:t>•  Awareness sin efecto — Formación anual aburrida. Usa simulacros frecuentes y feedback inmediato.</a:t>
-            </a:r>
-          </a:p>
-          <a:p>
-            <a:pPr>
-              <a:spcAft>
-                <a:spcPts val="600"/>
-              </a:spcAft>
-            </a:pPr>
-            <a:r>
-              <a:rPr sz="1500">
-                <a:solidFill>
-                  <a:srgbClr val="22282E"/>
-                </a:solidFill>
-              </a:rPr>
-              <a:t>•  Helpdesk resetea sin validar — Falta verificación fuera de banda. Implanta preguntas y canal alternativo.</a:t>
+              <a:t>•  Publica y valida SPF de un dominio de laboratorio: dig TXT tudominio.com y revisa el registro.</a:t>
+            </a:r>
+          </a:p>
+          <a:p>
+            <a:pPr>
+              <a:spcAft>
+                <a:spcPts val="600"/>
+              </a:spcAft>
+            </a:pPr>
+            <a:r>
+              <a:rPr sz="1500">
+                <a:solidFill>
+                  <a:srgbClr val="22282E"/>
+                </a:solidFill>
+              </a:rPr>
+              <a:t>•  Configura DMARC en modo monitor: crea dmarc con v=DMARC1; p=none; rua=mailto:... y observa los reportes.</a:t>
+            </a:r>
+          </a:p>
+          <a:p>
+            <a:pPr>
+              <a:spcAft>
+                <a:spcPts val="600"/>
+              </a:spcAft>
+            </a:pPr>
+            <a:r>
+              <a:rPr sz="1500">
+                <a:solidFill>
+                  <a:srgbClr val="22282E"/>
+                </a:solidFill>
+              </a:rPr>
+              <a:t>•  Endurece a p=quarantine y luego p=reject tras validar que el correo legítimo pasa.</a:t>
+            </a:r>
+          </a:p>
+          <a:p>
+            <a:pPr>
+              <a:spcAft>
+                <a:spcPts val="600"/>
+              </a:spcAft>
+            </a:pPr>
+            <a:r>
+              <a:rPr sz="1500">
+                <a:solidFill>
+                  <a:srgbClr val="22282E"/>
+                </a:solidFill>
+              </a:rPr>
+              <a:t>•  Diseña un procedimiento de verificación fuera de banda para el helpdesk (reseteos de contraseña).</a:t>
+            </a:r>
+          </a:p>
+          <a:p>
+            <a:pPr>
+              <a:spcAft>
+                <a:spcPts val="600"/>
+              </a:spcAft>
+            </a:pPr>
+            <a:r>
+              <a:rPr sz="1500">
+                <a:solidFill>
+                  <a:srgbClr val="22282E"/>
+                </a:solidFill>
+              </a:rPr>
+              <a:t>•  Redacta un procedimiento antifraude para pagos: doble aprobación y verificación por canal conocido.</a:t>
+            </a:r>
+          </a:p>
+          <a:p>
+            <a:pPr>
+              <a:spcAft>
+                <a:spcPts val="600"/>
+              </a:spcAft>
+            </a:pPr>
+            <a:r>
+              <a:rPr sz="1500">
+                <a:solidFill>
+                  <a:srgbClr val="22282E"/>
+                </a:solidFill>
+              </a:rPr>
+              <a:t>•  Define el flujo del botón de reporte: destino, triage y retroalimentación al usuario.</a:t>
+            </a:r>
+          </a:p>
+          <a:p>
+            <a:pPr>
+              <a:spcAft>
+                <a:spcPts val="600"/>
+              </a:spcAft>
+            </a:pPr>
+            <a:r>
+              <a:rPr sz="1500">
+                <a:solidFill>
+                  <a:srgbClr val="22282E"/>
+                </a:solidFill>
+              </a:rPr>
+              <a:t>•  Construye un plan de concienciación trimestral con simulacros y métricas.</a:t>
             </a:r>
           </a:p>
         </p:txBody>
@@ -3347,7 +3381,7 @@
                   <a:srgbClr val="0B3D2E"/>
                 </a:solidFill>
               </a:rPr>
-              <a:t>❓ Preguntas frecuentes</a:t>
+              <a:t>✍️ Ejercicios</a:t>
             </a:r>
           </a:p>
         </p:txBody>
@@ -3385,97 +3419,82 @@
                   <a:srgbClr val="22282E"/>
                 </a:solidFill>
               </a:rPr>
-              <a:t>•  ❓ ¿DMARC elimina el phishing?</a:t>
-            </a:r>
-          </a:p>
-          <a:p>
-            <a:pPr>
-              <a:spcAft>
-                <a:spcPts val="600"/>
-              </a:spcAft>
-            </a:pPr>
-            <a:r>
-              <a:rPr sz="1500">
-                <a:solidFill>
-                  <a:srgbClr val="22282E"/>
-                </a:solidFill>
-              </a:rPr>
-              <a:t>•  Reduce la suplantación de tu dominio, no los correos de dominios parecidos (typosquatting). Es una</a:t>
-            </a:r>
-          </a:p>
-          <a:p>
-            <a:pPr>
-              <a:spcAft>
-                <a:spcPts val="600"/>
-              </a:spcAft>
-            </a:pPr>
-            <a:r>
-              <a:rPr sz="1500">
-                <a:solidFill>
-                  <a:srgbClr val="22282E"/>
-                </a:solidFill>
-              </a:rPr>
-              <a:t>•  capa, no la solución completa.</a:t>
-            </a:r>
-          </a:p>
-          <a:p>
-            <a:pPr>
-              <a:spcAft>
-                <a:spcPts val="600"/>
-              </a:spcAft>
-            </a:pPr>
-            <a:r>
-              <a:rPr sz="1500">
-                <a:solidFill>
-                  <a:srgbClr val="22282E"/>
-                </a:solidFill>
-              </a:rPr>
-              <a:t>•  ❓ ¿Basta con formar a la gente?</a:t>
-            </a:r>
-          </a:p>
-          <a:p>
-            <a:pPr>
-              <a:spcAft>
-                <a:spcPts val="600"/>
-              </a:spcAft>
-            </a:pPr>
-            <a:r>
-              <a:rPr sz="1500">
-                <a:solidFill>
-                  <a:srgbClr val="22282E"/>
-                </a:solidFill>
-              </a:rPr>
-              <a:t>•  No. La concienciación es una capa junto a controles técnicos. Culpar solo al usuario es un antipatrón;</a:t>
-            </a:r>
-          </a:p>
-          <a:p>
-            <a:pPr>
-              <a:spcAft>
-                <a:spcPts val="600"/>
-              </a:spcAft>
-            </a:pPr>
-            <a:r>
-              <a:rPr sz="1500">
-                <a:solidFill>
-                  <a:srgbClr val="22282E"/>
-                </a:solidFill>
-              </a:rPr>
-              <a:t>•  diseña sistemas que fallen de forma segura.</a:t>
-            </a:r>
-          </a:p>
-          <a:p>
-            <a:pPr>
-              <a:spcAft>
-                <a:spcPts val="600"/>
-              </a:spcAft>
-            </a:pPr>
-            <a:r>
-              <a:rPr sz="1500">
-                <a:solidFill>
-                  <a:srgbClr val="22282E"/>
-                </a:solidFill>
-              </a:rPr>
-              <a:t>•  ❓ ¿Qué MFA resiste el phishing?</a:t>
+              <a:t>•  Explica cómo DMARC p=reject frustra un ataque de suplantación de dominio.</a:t>
+            </a:r>
+          </a:p>
+          <a:p>
+            <a:pPr>
+              <a:spcAft>
+                <a:spcPts val="600"/>
+              </a:spcAft>
+            </a:pPr>
+            <a:r>
+              <a:rPr sz="1500">
+                <a:solidFill>
+                  <a:srgbClr val="22282E"/>
+                </a:solidFill>
+              </a:rPr>
+              <a:t>•  Compara MFA por SMS vs. FIDO2 frente a un ataque AiTM.</a:t>
+            </a:r>
+          </a:p>
+          <a:p>
+            <a:pPr>
+              <a:spcAft>
+                <a:spcPts val="600"/>
+              </a:spcAft>
+            </a:pPr>
+            <a:r>
+              <a:rPr sz="1500">
+                <a:solidFill>
+                  <a:srgbClr val="22282E"/>
+                </a:solidFill>
+              </a:rPr>
+              <a:t>•  Diseña 5 preguntas de verificación de identidad robustas para el helpdesk.</a:t>
+            </a:r>
+          </a:p>
+          <a:p>
+            <a:pPr>
+              <a:spcAft>
+                <a:spcPts val="600"/>
+              </a:spcAft>
+            </a:pPr>
+            <a:r>
+              <a:rPr sz="1500">
+                <a:solidFill>
+                  <a:srgbClr val="22282E"/>
+                </a:solidFill>
+              </a:rPr>
+              <a:t>•  Propón métricas de un programa de awareness más allá de la tasa de clic.</a:t>
+            </a:r>
+          </a:p>
+          <a:p>
+            <a:pPr>
+              <a:spcAft>
+                <a:spcPts val="600"/>
+              </a:spcAft>
+            </a:pPr>
+            <a:r>
+              <a:rPr sz="1500">
+                <a:solidFill>
+                  <a:srgbClr val="22282E"/>
+                </a:solidFill>
+              </a:rPr>
+              <a:t>•  Redacta el mensaje de retroalimentación positiva a quien reporta un phishing.</a:t>
+            </a:r>
+          </a:p>
+          <a:p>
+            <a:pPr>
+              <a:spcAft>
+                <a:spcPts val="600"/>
+              </a:spcAft>
+            </a:pPr>
+            <a:r>
+              <a:rPr sz="1500">
+                <a:solidFill>
+                  <a:srgbClr val="22282E"/>
+                </a:solidFill>
+              </a:rPr>
+              <a:t>•  Elabora un playbook de contención para credenciales comprometidas.</a:t>
             </a:r>
           </a:p>
         </p:txBody>
@@ -3526,7 +3545,7 @@
                   <a:srgbClr val="0B3D2E"/>
                 </a:solidFill>
               </a:rPr>
-              <a:t>🔗 Referencias</a:t>
+              <a:t>📝 Reto verificable</a:t>
             </a:r>
           </a:p>
         </p:txBody>
@@ -3564,6 +3583,483 @@
                   <a:srgbClr val="22282E"/>
                 </a:solidFill>
               </a:rPr>
+              <a:t>•  Entrega un plan de defensa contra ingeniería social que cubra: autenticación de correo, MFA</a:t>
+            </a:r>
+          </a:p>
+          <a:p>
+            <a:pPr>
+              <a:spcAft>
+                <a:spcPts val="600"/>
+              </a:spcAft>
+            </a:pPr>
+            <a:r>
+              <a:rPr sz="1500">
+                <a:solidFill>
+                  <a:srgbClr val="22282E"/>
+                </a:solidFill>
+              </a:rPr>
+              <a:t>•  resistente, verificación de identidad, programa de concienciación con métricas y playbook de</a:t>
+            </a:r>
+          </a:p>
+          <a:p>
+            <a:pPr>
+              <a:spcAft>
+                <a:spcPts val="600"/>
+              </a:spcAft>
+            </a:pPr>
+            <a:r>
+              <a:rPr sz="1500">
+                <a:solidFill>
+                  <a:srgbClr val="22282E"/>
+                </a:solidFill>
+              </a:rPr>
+              <a:t>•  respuesta.</a:t>
+            </a:r>
+          </a:p>
+          <a:p>
+            <a:pPr>
+              <a:spcAft>
+                <a:spcPts val="600"/>
+              </a:spcAft>
+            </a:pPr>
+            <a:r>
+              <a:rPr sz="1500">
+                <a:solidFill>
+                  <a:srgbClr val="22282E"/>
+                </a:solidFill>
+              </a:rPr>
+              <a:t>•  Criterio de aceptación: el plan incluye configuración DMARC verificable, al menos un control por</a:t>
+            </a:r>
+          </a:p>
+          <a:p>
+            <a:pPr>
+              <a:spcAft>
+                <a:spcPts val="600"/>
+              </a:spcAft>
+            </a:pPr>
+            <a:r>
+              <a:rPr sz="1500">
+                <a:solidFill>
+                  <a:srgbClr val="22282E"/>
+                </a:solidFill>
+              </a:rPr>
+              <a:t>•  cada vector (phishing, vishing, pretexting) y métricas que midan resiliencia, no solo víctimas.</a:t>
+            </a:r>
+          </a:p>
+        </p:txBody>
+      </p:sp>
+    </p:spTree>
+  </p:cSld>
+  <p:clrMapOvr>
+    <a:masterClrMapping/>
+  </p:clrMapOvr>
+</p:sld>
+</file>
+
+<file path=ppt/slides/slide13.xml><?xml version="1.0" encoding="utf-8"?>
+<p:sld xmlns:a="http://schemas.openxmlformats.org/drawingml/2006/main" xmlns:p="http://schemas.openxmlformats.org/presentationml/2006/main" xmlns:r="http://schemas.openxmlformats.org/officeDocument/2006/relationships">
+  <p:cSld>
+    <p:spTree>
+      <p:nvGrpSpPr>
+        <p:cNvPr id="1" name=""/>
+        <p:cNvGrpSpPr/>
+        <p:nvPr/>
+      </p:nvGrpSpPr>
+      <p:grpSpPr/>
+      <p:sp>
+        <p:nvSpPr>
+          <p:cNvPr id="2" name="TextBox 1"/>
+          <p:cNvSpPr txBox="1"/>
+          <p:nvPr/>
+        </p:nvSpPr>
+        <p:spPr>
+          <a:xfrm>
+            <a:off x="457200" y="320040"/>
+            <a:ext cx="8229600" cy="822960"/>
+          </a:xfrm>
+          <a:prstGeom prst="rect">
+            <a:avLst/>
+          </a:prstGeom>
+          <a:noFill/>
+        </p:spPr>
+        <p:txBody>
+          <a:bodyPr wrap="square">
+            <a:spAutoFit/>
+          </a:bodyPr>
+          <a:lstStyle/>
+          <a:p>
+            <a:r>
+              <a:rPr sz="2600" b="1">
+                <a:solidFill>
+                  <a:srgbClr val="0B3D2E"/>
+                </a:solidFill>
+              </a:rPr>
+              <a:t>⚠️ Errores comunes</a:t>
+            </a:r>
+          </a:p>
+        </p:txBody>
+      </p:sp>
+      <p:sp>
+        <p:nvSpPr>
+          <p:cNvPr id="3" name="TextBox 2"/>
+          <p:cNvSpPr txBox="1"/>
+          <p:nvPr/>
+        </p:nvSpPr>
+        <p:spPr>
+          <a:xfrm>
+            <a:off x="457200" y="1280160"/>
+            <a:ext cx="8229600" cy="4937760"/>
+          </a:xfrm>
+          <a:prstGeom prst="rect">
+            <a:avLst/>
+          </a:prstGeom>
+          <a:noFill/>
+        </p:spPr>
+        <p:txBody>
+          <a:bodyPr wrap="square">
+            <a:spAutoFit/>
+          </a:bodyPr>
+          <a:lstStyle/>
+          <a:p>
+            <a:pPr>
+              <a:spcAft>
+                <a:spcPts val="600"/>
+              </a:spcAft>
+            </a:pPr>
+            <a:r>
+              <a:rPr sz="1500">
+                <a:solidFill>
+                  <a:srgbClr val="22282E"/>
+                </a:solidFill>
+              </a:rPr>
+              <a:t>•  DMARC rompe correo legítimo — Se pasó a reject sin monitorizar. Empieza en p=none, analiza y sube gradualmente.</a:t>
+            </a:r>
+          </a:p>
+          <a:p>
+            <a:pPr>
+              <a:spcAft>
+                <a:spcPts val="600"/>
+              </a:spcAft>
+            </a:pPr>
+            <a:r>
+              <a:rPr sz="1500">
+                <a:solidFill>
+                  <a:srgbClr val="22282E"/>
+                </a:solidFill>
+              </a:rPr>
+              <a:t>•  MFA por SMS eludido — Vulnerable a AiTM/SIM swap. Migra a FIDO2/passkeys.</a:t>
+            </a:r>
+          </a:p>
+          <a:p>
+            <a:pPr>
+              <a:spcAft>
+                <a:spcPts val="600"/>
+              </a:spcAft>
+            </a:pPr>
+            <a:r>
+              <a:rPr sz="1500">
+                <a:solidFill>
+                  <a:srgbClr val="22282E"/>
+                </a:solidFill>
+              </a:rPr>
+              <a:t>•  Usuarios no reportan — No hay botón o hay miedo a represalias. Facilita el reporte y refuerza positivamente.</a:t>
+            </a:r>
+          </a:p>
+          <a:p>
+            <a:pPr>
+              <a:spcAft>
+                <a:spcPts val="600"/>
+              </a:spcAft>
+            </a:pPr>
+            <a:r>
+              <a:rPr sz="1500">
+                <a:solidFill>
+                  <a:srgbClr val="22282E"/>
+                </a:solidFill>
+              </a:rPr>
+              <a:t>•  Awareness sin efecto — Formación anual aburrida. Usa simulacros frecuentes y feedback inmediato.</a:t>
+            </a:r>
+          </a:p>
+          <a:p>
+            <a:pPr>
+              <a:spcAft>
+                <a:spcPts val="600"/>
+              </a:spcAft>
+            </a:pPr>
+            <a:r>
+              <a:rPr sz="1500">
+                <a:solidFill>
+                  <a:srgbClr val="22282E"/>
+                </a:solidFill>
+              </a:rPr>
+              <a:t>•  Helpdesk resetea sin validar — Falta verificación fuera de banda. Implanta preguntas y canal alternativo.</a:t>
+            </a:r>
+          </a:p>
+        </p:txBody>
+      </p:sp>
+    </p:spTree>
+  </p:cSld>
+  <p:clrMapOvr>
+    <a:masterClrMapping/>
+  </p:clrMapOvr>
+</p:sld>
+</file>
+
+<file path=ppt/slides/slide14.xml><?xml version="1.0" encoding="utf-8"?>
+<p:sld xmlns:a="http://schemas.openxmlformats.org/drawingml/2006/main" xmlns:p="http://schemas.openxmlformats.org/presentationml/2006/main" xmlns:r="http://schemas.openxmlformats.org/officeDocument/2006/relationships">
+  <p:cSld>
+    <p:spTree>
+      <p:nvGrpSpPr>
+        <p:cNvPr id="1" name=""/>
+        <p:cNvGrpSpPr/>
+        <p:nvPr/>
+      </p:nvGrpSpPr>
+      <p:grpSpPr/>
+      <p:sp>
+        <p:nvSpPr>
+          <p:cNvPr id="2" name="TextBox 1"/>
+          <p:cNvSpPr txBox="1"/>
+          <p:nvPr/>
+        </p:nvSpPr>
+        <p:spPr>
+          <a:xfrm>
+            <a:off x="457200" y="320040"/>
+            <a:ext cx="8229600" cy="822960"/>
+          </a:xfrm>
+          <a:prstGeom prst="rect">
+            <a:avLst/>
+          </a:prstGeom>
+          <a:noFill/>
+        </p:spPr>
+        <p:txBody>
+          <a:bodyPr wrap="square">
+            <a:spAutoFit/>
+          </a:bodyPr>
+          <a:lstStyle/>
+          <a:p>
+            <a:r>
+              <a:rPr sz="2600" b="1">
+                <a:solidFill>
+                  <a:srgbClr val="0B3D2E"/>
+                </a:solidFill>
+              </a:rPr>
+              <a:t>❓ Preguntas frecuentes</a:t>
+            </a:r>
+          </a:p>
+        </p:txBody>
+      </p:sp>
+      <p:sp>
+        <p:nvSpPr>
+          <p:cNvPr id="3" name="TextBox 2"/>
+          <p:cNvSpPr txBox="1"/>
+          <p:nvPr/>
+        </p:nvSpPr>
+        <p:spPr>
+          <a:xfrm>
+            <a:off x="457200" y="1280160"/>
+            <a:ext cx="8229600" cy="4937760"/>
+          </a:xfrm>
+          <a:prstGeom prst="rect">
+            <a:avLst/>
+          </a:prstGeom>
+          <a:noFill/>
+        </p:spPr>
+        <p:txBody>
+          <a:bodyPr wrap="square">
+            <a:spAutoFit/>
+          </a:bodyPr>
+          <a:lstStyle/>
+          <a:p>
+            <a:pPr>
+              <a:spcAft>
+                <a:spcPts val="600"/>
+              </a:spcAft>
+            </a:pPr>
+            <a:r>
+              <a:rPr sz="1500">
+                <a:solidFill>
+                  <a:srgbClr val="22282E"/>
+                </a:solidFill>
+              </a:rPr>
+              <a:t>•  ❓ ¿DMARC elimina el phishing?</a:t>
+            </a:r>
+          </a:p>
+          <a:p>
+            <a:pPr>
+              <a:spcAft>
+                <a:spcPts val="600"/>
+              </a:spcAft>
+            </a:pPr>
+            <a:r>
+              <a:rPr sz="1500">
+                <a:solidFill>
+                  <a:srgbClr val="22282E"/>
+                </a:solidFill>
+              </a:rPr>
+              <a:t>•  Reduce la suplantación de tu dominio, no los correos de dominios parecidos (typosquatting). Es una</a:t>
+            </a:r>
+          </a:p>
+          <a:p>
+            <a:pPr>
+              <a:spcAft>
+                <a:spcPts val="600"/>
+              </a:spcAft>
+            </a:pPr>
+            <a:r>
+              <a:rPr sz="1500">
+                <a:solidFill>
+                  <a:srgbClr val="22282E"/>
+                </a:solidFill>
+              </a:rPr>
+              <a:t>•  capa, no la solución completa.</a:t>
+            </a:r>
+          </a:p>
+          <a:p>
+            <a:pPr>
+              <a:spcAft>
+                <a:spcPts val="600"/>
+              </a:spcAft>
+            </a:pPr>
+            <a:r>
+              <a:rPr sz="1500">
+                <a:solidFill>
+                  <a:srgbClr val="22282E"/>
+                </a:solidFill>
+              </a:rPr>
+              <a:t>•  ❓ ¿Basta con formar a la gente?</a:t>
+            </a:r>
+          </a:p>
+          <a:p>
+            <a:pPr>
+              <a:spcAft>
+                <a:spcPts val="600"/>
+              </a:spcAft>
+            </a:pPr>
+            <a:r>
+              <a:rPr sz="1500">
+                <a:solidFill>
+                  <a:srgbClr val="22282E"/>
+                </a:solidFill>
+              </a:rPr>
+              <a:t>•  No. La concienciación es una capa junto a controles técnicos. Culpar solo al usuario es un antipatrón;</a:t>
+            </a:r>
+          </a:p>
+          <a:p>
+            <a:pPr>
+              <a:spcAft>
+                <a:spcPts val="600"/>
+              </a:spcAft>
+            </a:pPr>
+            <a:r>
+              <a:rPr sz="1500">
+                <a:solidFill>
+                  <a:srgbClr val="22282E"/>
+                </a:solidFill>
+              </a:rPr>
+              <a:t>•  diseña sistemas que fallen de forma segura.</a:t>
+            </a:r>
+          </a:p>
+          <a:p>
+            <a:pPr>
+              <a:spcAft>
+                <a:spcPts val="600"/>
+              </a:spcAft>
+            </a:pPr>
+            <a:r>
+              <a:rPr sz="1500">
+                <a:solidFill>
+                  <a:srgbClr val="22282E"/>
+                </a:solidFill>
+              </a:rPr>
+              <a:t>•  ❓ ¿Qué MFA resiste el phishing?</a:t>
+            </a:r>
+          </a:p>
+        </p:txBody>
+      </p:sp>
+    </p:spTree>
+  </p:cSld>
+  <p:clrMapOvr>
+    <a:masterClrMapping/>
+  </p:clrMapOvr>
+</p:sld>
+</file>
+
+<file path=ppt/slides/slide15.xml><?xml version="1.0" encoding="utf-8"?>
+<p:sld xmlns:a="http://schemas.openxmlformats.org/drawingml/2006/main" xmlns:p="http://schemas.openxmlformats.org/presentationml/2006/main" xmlns:r="http://schemas.openxmlformats.org/officeDocument/2006/relationships">
+  <p:cSld>
+    <p:spTree>
+      <p:nvGrpSpPr>
+        <p:cNvPr id="1" name=""/>
+        <p:cNvGrpSpPr/>
+        <p:nvPr/>
+      </p:nvGrpSpPr>
+      <p:grpSpPr/>
+      <p:sp>
+        <p:nvSpPr>
+          <p:cNvPr id="2" name="TextBox 1"/>
+          <p:cNvSpPr txBox="1"/>
+          <p:nvPr/>
+        </p:nvSpPr>
+        <p:spPr>
+          <a:xfrm>
+            <a:off x="457200" y="320040"/>
+            <a:ext cx="8229600" cy="822960"/>
+          </a:xfrm>
+          <a:prstGeom prst="rect">
+            <a:avLst/>
+          </a:prstGeom>
+          <a:noFill/>
+        </p:spPr>
+        <p:txBody>
+          <a:bodyPr wrap="square">
+            <a:spAutoFit/>
+          </a:bodyPr>
+          <a:lstStyle/>
+          <a:p>
+            <a:r>
+              <a:rPr sz="2600" b="1">
+                <a:solidFill>
+                  <a:srgbClr val="0B3D2E"/>
+                </a:solidFill>
+              </a:rPr>
+              <a:t>🔗 Referencias</a:t>
+            </a:r>
+          </a:p>
+        </p:txBody>
+      </p:sp>
+      <p:sp>
+        <p:nvSpPr>
+          <p:cNvPr id="3" name="TextBox 2"/>
+          <p:cNvSpPr txBox="1"/>
+          <p:nvPr/>
+        </p:nvSpPr>
+        <p:spPr>
+          <a:xfrm>
+            <a:off x="457200" y="1280160"/>
+            <a:ext cx="8229600" cy="4937760"/>
+          </a:xfrm>
+          <a:prstGeom prst="rect">
+            <a:avLst/>
+          </a:prstGeom>
+          <a:noFill/>
+        </p:spPr>
+        <p:txBody>
+          <a:bodyPr wrap="square">
+            <a:spAutoFit/>
+          </a:bodyPr>
+          <a:lstStyle/>
+          <a:p>
+            <a:pPr>
+              <a:spcAft>
+                <a:spcPts val="600"/>
+              </a:spcAft>
+            </a:pPr>
+            <a:r>
+              <a:rPr sz="1500">
+                <a:solidFill>
+                  <a:srgbClr val="22282E"/>
+                </a:solidFill>
+              </a:rPr>
               <a:t>•  NIST SP 800-50 — Awareness and Training. &lt;https://csrc.nist.gov/pubs/sp/800/50/final&gt;</a:t>
             </a:r>
           </a:p>
@@ -3627,8 +4123,98 @@
               <a:t>•  ENISA — Cybersecurity awareness. &lt;https://www.enisa.europa.eu/&gt;</a:t>
             </a:r>
           </a:p>
-        </p:txBody>
-      </p:sp>
+          <a:p>
+            <a:pPr>
+              <a:spcAft>
+                <a:spcPts val="600"/>
+              </a:spcAft>
+            </a:pPr>
+            <a:r>
+              <a:rPr sz="1500">
+                <a:solidFill>
+                  <a:srgbClr val="22282E"/>
+                </a:solidFill>
+              </a:rPr>
+              <a:t>•  NIST SP 800-63B-4 — Authenticator and Verifier Requirements. &lt;https://pages.nist.gov/800-63-4/sp800-63b/authenticators/&gt;</a:t>
+            </a:r>
+          </a:p>
+        </p:txBody>
+      </p:sp>
+    </p:spTree>
+  </p:cSld>
+  <p:clrMapOvr>
+    <a:masterClrMapping/>
+  </p:clrMapOvr>
+</p:sld>
+</file>
+
+<file path=ppt/slides/slide16.xml><?xml version="1.0" encoding="utf-8"?>
+<p:sld xmlns:a="http://schemas.openxmlformats.org/drawingml/2006/main" xmlns:p="http://schemas.openxmlformats.org/presentationml/2006/main" xmlns:r="http://schemas.openxmlformats.org/officeDocument/2006/relationships">
+  <p:cSld>
+    <p:spTree>
+      <p:nvGrpSpPr>
+        <p:cNvPr id="1" name=""/>
+        <p:cNvGrpSpPr/>
+        <p:nvPr/>
+      </p:nvGrpSpPr>
+      <p:grpSpPr/>
+      <p:sp>
+        <p:nvSpPr>
+          <p:cNvPr id="2" name="TextBox 1"/>
+          <p:cNvSpPr txBox="1"/>
+          <p:nvPr/>
+        </p:nvSpPr>
+        <p:spPr>
+          <a:xfrm>
+            <a:off x="457200" y="274320"/>
+            <a:ext cx="8229600" cy="640080"/>
+          </a:xfrm>
+          <a:prstGeom prst="rect">
+            <a:avLst/>
+          </a:prstGeom>
+          <a:noFill/>
+        </p:spPr>
+        <p:txBody>
+          <a:bodyPr wrap="square">
+            <a:spAutoFit/>
+          </a:bodyPr>
+          <a:lstStyle/>
+          <a:p>
+            <a:r>
+              <a:rPr sz="2200" b="1">
+                <a:solidFill>
+                  <a:srgbClr val="0B3D2E"/>
+                </a:solidFill>
+              </a:rPr>
+              <a:t>Diagrama de la clase</a:t>
+            </a:r>
+          </a:p>
+        </p:txBody>
+      </p:sp>
+      <p:pic>
+        <p:nvPicPr>
+          <p:cNvPr id="3" name="Picture 2" descr="995712fc5693da7d.png"/>
+          <p:cNvPicPr>
+            <a:picLocks noChangeAspect="1"/>
+          </p:cNvPicPr>
+          <p:nvPr/>
+        </p:nvPicPr>
+        <p:blipFill>
+          <a:blip r:embed="rId2"/>
+          <a:stretch>
+            <a:fillRect/>
+          </a:stretch>
+        </p:blipFill>
+        <p:spPr>
+          <a:xfrm>
+            <a:off x="2813392" y="1097280"/>
+            <a:ext cx="3517216" cy="5303520"/>
+          </a:xfrm>
+          <a:prstGeom prst="rect">
+            <a:avLst/>
+          </a:prstGeom>
+        </p:spPr>
+      </p:pic>
     </p:spTree>
   </p:cSld>
   <p:clrMapOvr>
@@ -4152,7 +4738,7 @@
                   <a:srgbClr val="0B3D2E"/>
                 </a:solidFill>
               </a:rPr>
-              <a:t>📖 Definiciones y características</a:t>
+              <a:t>🧠 Explicación en profundidad</a:t>
             </a:r>
           </a:p>
         </p:txBody>
@@ -4190,82 +4776,67 @@
                   <a:srgbClr val="22282E"/>
                 </a:solidFill>
               </a:rPr>
-              <a:t>•  SPF/DKIM/DMARC: mecanismos DNS que autentican el correo. Característica: con DMARC en p=reject el dominio es difícil de suplantar.</a:t>
-            </a:r>
-          </a:p>
-          <a:p>
-            <a:pPr>
-              <a:spcAft>
-                <a:spcPts val="600"/>
-              </a:spcAft>
-            </a:pPr>
-            <a:r>
-              <a:rPr sz="1500">
-                <a:solidFill>
-                  <a:srgbClr val="22282E"/>
-                </a:solidFill>
-              </a:rPr>
-              <a:t>•  MFA resistente a phishing: factores no interceptables (FIDO2/passkeys). Característica: derrotan páginas falsas y proxies AiTM.</a:t>
-            </a:r>
-          </a:p>
-          <a:p>
-            <a:pPr>
-              <a:spcAft>
-                <a:spcPts val="600"/>
-              </a:spcAft>
-            </a:pPr>
-            <a:r>
-              <a:rPr sz="1500">
-                <a:solidFill>
-                  <a:srgbClr val="22282E"/>
-                </a:solidFill>
-              </a:rPr>
-              <a:t>•  Sandboxing de adjuntos/URL: detonación en entorno aislado. Característica: detecta payloads antes del usuario.</a:t>
-            </a:r>
-          </a:p>
-          <a:p>
-            <a:pPr>
-              <a:spcAft>
-                <a:spcPts val="600"/>
-              </a:spcAft>
-            </a:pPr>
-            <a:r>
-              <a:rPr sz="1500">
-                <a:solidFill>
-                  <a:srgbClr val="22282E"/>
-                </a:solidFill>
-              </a:rPr>
-              <a:t>•  Verificación fuera de banda: confirmar por un canal distinto al de la petición. Característica: frustra pretextos urgentes.</a:t>
-            </a:r>
-          </a:p>
-          <a:p>
-            <a:pPr>
-              <a:spcAft>
-                <a:spcPts val="600"/>
-              </a:spcAft>
-            </a:pPr>
-            <a:r>
-              <a:rPr sz="1500">
-                <a:solidFill>
-                  <a:srgbClr val="22282E"/>
-                </a:solidFill>
-              </a:rPr>
-              <a:t>•  Tasa de reporte: proporción de usuarios que reportan un correo sospechoso. Característica: indicador clave de cultura.</a:t>
-            </a:r>
-          </a:p>
-          <a:p>
-            <a:pPr>
-              <a:spcAft>
-                <a:spcPts val="600"/>
-              </a:spcAft>
-            </a:pPr>
-            <a:r>
-              <a:rPr sz="1500">
-                <a:solidFill>
-                  <a:srgbClr val="22282E"/>
-                </a:solidFill>
-              </a:rPr>
-              <a:t>•  Playbook de respuesta: guía de acciones ante un incidente. Característica: reduce el tiempo de contención.</a:t>
+              <a:t>•  La concienciación ayuda, pero ninguna persona mantiene atención perfecta. La arquitectura debe asumir mensajes convincentes, cuentas comprometidas y momentos de presión. Se combinan controles…</a:t>
+            </a:r>
+          </a:p>
+          <a:p>
+            <a:pPr>
+              <a:spcAft>
+                <a:spcPts val="600"/>
+              </a:spcAft>
+            </a:pPr>
+            <a:r>
+              <a:rPr sz="1500">
+                <a:solidFill>
+                  <a:srgbClr val="22282E"/>
+                </a:solidFill>
+              </a:rPr>
+              <a:t>•  Autenticación y autorización de negocio no son lo mismo. Passkeys/WebAuthn bien configuradas resisten el phishing mediante vinculación al verificador, como describe NIST SP 800-63B-4; SMS y OTP…</a:t>
+            </a:r>
+          </a:p>
+          <a:p>
+            <a:pPr>
+              <a:spcAft>
+                <a:spcPts val="600"/>
+              </a:spcAft>
+            </a:pPr>
+            <a:r>
+              <a:rPr sz="1500">
+                <a:solidFill>
+                  <a:srgbClr val="22282E"/>
+                </a:solidFill>
+              </a:rPr>
+              <a:t>•  Un botón de reporte conserva encabezados y mensaje original, informa al usuario y alimenta automatización. SOC deduplica campañas, busca destinatarios, bloquea indicadores y evalúa cuentas. El canal…</a:t>
+            </a:r>
+          </a:p>
+          <a:p>
+            <a:pPr>
+              <a:spcAft>
+                <a:spcPts val="600"/>
+              </a:spcAft>
+            </a:pPr>
+            <a:r>
+              <a:rPr sz="1500">
+                <a:solidFill>
+                  <a:srgbClr val="22282E"/>
+                </a:solidFill>
+              </a:rPr>
+              <a:t>•  Si alguien hizo clic, se determina qué se ejecutó y qué datos se entregaron. Si ingresó una contraseña, se restablece, revocan sesiones y tokens, se revisan reglas de correo y actividad posterior…</a:t>
+            </a:r>
+          </a:p>
+          <a:p>
+            <a:pPr>
+              <a:spcAft>
+                <a:spcPts val="600"/>
+              </a:spcAft>
+            </a:pPr>
+            <a:r>
+              <a:rPr sz="1500">
+                <a:solidFill>
+                  <a:srgbClr val="22282E"/>
+                </a:solidFill>
+              </a:rPr>
+              <a:t>•  Una víctima entrega contraseña y OTP a un proxy en tiempo real. El atacante obtiene sesión. La organización no concluye que «MFA no sirve»; identifica que ese autenticador no era resistente al…</a:t>
             </a:r>
           </a:p>
         </p:txBody>
@@ -4316,7 +4887,7 @@
                   <a:srgbClr val="0B3D2E"/>
                 </a:solidFill>
               </a:rPr>
-              <a:t>🧰 Herramientas y preparación</a:t>
+              <a:t>📔 Glosario operativo</a:t>
             </a:r>
           </a:p>
         </p:txBody>
@@ -4354,67 +4925,82 @@
                   <a:srgbClr val="22282E"/>
                 </a:solidFill>
               </a:rPr>
-              <a:t>•  Correo: registros DNS SPF/DKIM/DMARC; analizadores como MXToolbox o dig.</a:t>
-            </a:r>
-          </a:p>
-          <a:p>
-            <a:pPr>
-              <a:spcAft>
-                <a:spcPts val="600"/>
-              </a:spcAft>
-            </a:pPr>
-            <a:r>
-              <a:rPr sz="1500">
-                <a:solidFill>
-                  <a:srgbClr val="22282E"/>
-                </a:solidFill>
-              </a:rPr>
-              <a:t>•  MFA: llaves FIDO2/passkeys; políticas de acceso condicional.</a:t>
-            </a:r>
-          </a:p>
-          <a:p>
-            <a:pPr>
-              <a:spcAft>
-                <a:spcPts val="600"/>
-              </a:spcAft>
-            </a:pPr>
-            <a:r>
-              <a:rPr sz="1500">
-                <a:solidFill>
-                  <a:srgbClr val="22282E"/>
-                </a:solidFill>
-              </a:rPr>
-              <a:t>•  Filtrado: pasarela de correo con sandboxing y reescritura de URL.</a:t>
-            </a:r>
-          </a:p>
-          <a:p>
-            <a:pPr>
-              <a:spcAft>
-                <a:spcPts val="600"/>
-              </a:spcAft>
-            </a:pPr>
-            <a:r>
-              <a:rPr sz="1500">
-                <a:solidFill>
-                  <a:srgbClr val="22282E"/>
-                </a:solidFill>
-              </a:rPr>
-              <a:t>•  Reporte: botón "Reportar phishing" integrado en el cliente de correo.</a:t>
-            </a:r>
-          </a:p>
-          <a:p>
-            <a:pPr>
-              <a:spcAft>
-                <a:spcPts val="600"/>
-              </a:spcAft>
-            </a:pPr>
-            <a:r>
-              <a:rPr sz="1500">
-                <a:solidFill>
-                  <a:srgbClr val="22282E"/>
-                </a:solidFill>
-              </a:rPr>
-              <a:t>•  Formación: plataforma de awareness con simulacros (enlaza con GoPhish, Clase 258).</a:t>
+              <a:t>•  Término — Definición útil</a:t>
+            </a:r>
+          </a:p>
+          <a:p>
+            <a:pPr>
+              <a:spcAft>
+                <a:spcPts val="600"/>
+              </a:spcAft>
+            </a:pPr>
+            <a:r>
+              <a:rPr sz="1500">
+                <a:solidFill>
+                  <a:srgbClr val="22282E"/>
+                </a:solidFill>
+              </a:rPr>
+              <a:t>•  Phishing resistance — Propiedad protocolaria que evita entregar una salida válida a un verificador impostor.</a:t>
+            </a:r>
+          </a:p>
+          <a:p>
+            <a:pPr>
+              <a:spcAft>
+                <a:spcPts val="600"/>
+              </a:spcAft>
+            </a:pPr>
+            <a:r>
+              <a:rPr sz="1500">
+                <a:solidFill>
+                  <a:srgbClr val="22282E"/>
+                </a:solidFill>
+              </a:rPr>
+              <a:t>•  Session revocation — Invalidación de sesiones y tokens ya emitidos.</a:t>
+            </a:r>
+          </a:p>
+          <a:p>
+            <a:pPr>
+              <a:spcAft>
+                <a:spcPts val="600"/>
+              </a:spcAft>
+            </a:pPr>
+            <a:r>
+              <a:rPr sz="1500">
+                <a:solidFill>
+                  <a:srgbClr val="22282E"/>
+                </a:solidFill>
+              </a:rPr>
+              <a:t>•  Callback — Verificación por un canal conocido e independiente.</a:t>
+            </a:r>
+          </a:p>
+          <a:p>
+            <a:pPr>
+              <a:spcAft>
+                <a:spcPts val="600"/>
+              </a:spcAft>
+            </a:pPr>
+            <a:r>
+              <a:rPr sz="1500">
+                <a:solidFill>
+                  <a:srgbClr val="22282E"/>
+                </a:solidFill>
+              </a:rPr>
+              <a:t>•  Doble control — Participación de dos autorizadores en una acción crítica.</a:t>
+            </a:r>
+          </a:p>
+          <a:p>
+            <a:pPr>
+              <a:spcAft>
+                <a:spcPts val="600"/>
+              </a:spcAft>
+            </a:pPr>
+            <a:r>
+              <a:rPr sz="1500">
+                <a:solidFill>
+                  <a:srgbClr val="22282E"/>
+                </a:solidFill>
+              </a:rPr>
+              <a:t>•  Triage — Clasificación inicial que determina alcance, urgencia y respuesta.</a:t>
             </a:r>
           </a:p>
         </p:txBody>
@@ -4465,7 +5051,7 @@
                   <a:srgbClr val="0B3D2E"/>
                 </a:solidFill>
               </a:rPr>
-              <a:t>🧪 Laboratorio guiado (ejercicio aplicado)</a:t>
+              <a:t>✅ Criterio de dominio</a:t>
             </a:r>
           </a:p>
         </p:txBody>
@@ -4503,97 +5089,7 @@
                   <a:srgbClr val="22282E"/>
                 </a:solidFill>
               </a:rPr>
-              <a:t>•  Publica y valida SPF de un dominio de laboratorio: dig TXT tudominio.com y revisa el registro.</a:t>
-            </a:r>
-          </a:p>
-          <a:p>
-            <a:pPr>
-              <a:spcAft>
-                <a:spcPts val="600"/>
-              </a:spcAft>
-            </a:pPr>
-            <a:r>
-              <a:rPr sz="1500">
-                <a:solidFill>
-                  <a:srgbClr val="22282E"/>
-                </a:solidFill>
-              </a:rPr>
-              <a:t>•  Configura DMARC en modo monitor: crea dmarc con v=DMARC1; p=none; rua=mailto:... y observa los reportes.</a:t>
-            </a:r>
-          </a:p>
-          <a:p>
-            <a:pPr>
-              <a:spcAft>
-                <a:spcPts val="600"/>
-              </a:spcAft>
-            </a:pPr>
-            <a:r>
-              <a:rPr sz="1500">
-                <a:solidFill>
-                  <a:srgbClr val="22282E"/>
-                </a:solidFill>
-              </a:rPr>
-              <a:t>•  Endurece a p=quarantine y luego p=reject tras validar que el correo legítimo pasa.</a:t>
-            </a:r>
-          </a:p>
-          <a:p>
-            <a:pPr>
-              <a:spcAft>
-                <a:spcPts val="600"/>
-              </a:spcAft>
-            </a:pPr>
-            <a:r>
-              <a:rPr sz="1500">
-                <a:solidFill>
-                  <a:srgbClr val="22282E"/>
-                </a:solidFill>
-              </a:rPr>
-              <a:t>•  Diseña un procedimiento de verificación fuera de banda para el helpdesk (reseteos de contraseña).</a:t>
-            </a:r>
-          </a:p>
-          <a:p>
-            <a:pPr>
-              <a:spcAft>
-                <a:spcPts val="600"/>
-              </a:spcAft>
-            </a:pPr>
-            <a:r>
-              <a:rPr sz="1500">
-                <a:solidFill>
-                  <a:srgbClr val="22282E"/>
-                </a:solidFill>
-              </a:rPr>
-              <a:t>•  Redacta un procedimiento antifraude para pagos: doble aprobación y verificación por canal conocido.</a:t>
-            </a:r>
-          </a:p>
-          <a:p>
-            <a:pPr>
-              <a:spcAft>
-                <a:spcPts val="600"/>
-              </a:spcAft>
-            </a:pPr>
-            <a:r>
-              <a:rPr sz="1500">
-                <a:solidFill>
-                  <a:srgbClr val="22282E"/>
-                </a:solidFill>
-              </a:rPr>
-              <a:t>•  Define el flujo del botón de reporte: destino, triage y retroalimentación al usuario.</a:t>
-            </a:r>
-          </a:p>
-          <a:p>
-            <a:pPr>
-              <a:spcAft>
-                <a:spcPts val="600"/>
-              </a:spcAft>
-            </a:pPr>
-            <a:r>
-              <a:rPr sz="1500">
-                <a:solidFill>
-                  <a:srgbClr val="22282E"/>
-                </a:solidFill>
-              </a:rPr>
-              <a:t>•  Construye un plan de concienciación trimestral con simulacros y métricas.</a:t>
+              <a:t>•  El alumno domina la defensa cuando puede mapear una solicitud a controles técnicos y de proceso, diferenciar tipos de MFA, diseñar reporte y respuesta, y medir reducción de riesgo sin responsabilizar…</a:t>
             </a:r>
           </a:p>
         </p:txBody>
@@ -4644,7 +5140,7 @@
                   <a:srgbClr val="0B3D2E"/>
                 </a:solidFill>
               </a:rPr>
-              <a:t>✍️ Ejercicios</a:t>
+              <a:t>📖 Definiciones y características</a:t>
             </a:r>
           </a:p>
         </p:txBody>
@@ -4682,82 +5178,82 @@
                   <a:srgbClr val="22282E"/>
                 </a:solidFill>
               </a:rPr>
-              <a:t>•  Explica cómo DMARC p=reject frustra un ataque de suplantación de dominio.</a:t>
-            </a:r>
-          </a:p>
-          <a:p>
-            <a:pPr>
-              <a:spcAft>
-                <a:spcPts val="600"/>
-              </a:spcAft>
-            </a:pPr>
-            <a:r>
-              <a:rPr sz="1500">
-                <a:solidFill>
-                  <a:srgbClr val="22282E"/>
-                </a:solidFill>
-              </a:rPr>
-              <a:t>•  Compara MFA por SMS vs. FIDO2 frente a un ataque AiTM.</a:t>
-            </a:r>
-          </a:p>
-          <a:p>
-            <a:pPr>
-              <a:spcAft>
-                <a:spcPts val="600"/>
-              </a:spcAft>
-            </a:pPr>
-            <a:r>
-              <a:rPr sz="1500">
-                <a:solidFill>
-                  <a:srgbClr val="22282E"/>
-                </a:solidFill>
-              </a:rPr>
-              <a:t>•  Diseña 5 preguntas de verificación de identidad robustas para el helpdesk.</a:t>
-            </a:r>
-          </a:p>
-          <a:p>
-            <a:pPr>
-              <a:spcAft>
-                <a:spcPts val="600"/>
-              </a:spcAft>
-            </a:pPr>
-            <a:r>
-              <a:rPr sz="1500">
-                <a:solidFill>
-                  <a:srgbClr val="22282E"/>
-                </a:solidFill>
-              </a:rPr>
-              <a:t>•  Propón métricas de un programa de awareness más allá de la tasa de clic.</a:t>
-            </a:r>
-          </a:p>
-          <a:p>
-            <a:pPr>
-              <a:spcAft>
-                <a:spcPts val="600"/>
-              </a:spcAft>
-            </a:pPr>
-            <a:r>
-              <a:rPr sz="1500">
-                <a:solidFill>
-                  <a:srgbClr val="22282E"/>
-                </a:solidFill>
-              </a:rPr>
-              <a:t>•  Redacta el mensaje de retroalimentación positiva a quien reporta un phishing.</a:t>
-            </a:r>
-          </a:p>
-          <a:p>
-            <a:pPr>
-              <a:spcAft>
-                <a:spcPts val="600"/>
-              </a:spcAft>
-            </a:pPr>
-            <a:r>
-              <a:rPr sz="1500">
-                <a:solidFill>
-                  <a:srgbClr val="22282E"/>
-                </a:solidFill>
-              </a:rPr>
-              <a:t>•  Elabora un playbook de contención para credenciales comprometidas.</a:t>
+              <a:t>•  SPF/DKIM/DMARC: mecanismos DNS que autentican el correo. Característica: con DMARC en p=reject el dominio es difícil de suplantar.</a:t>
+            </a:r>
+          </a:p>
+          <a:p>
+            <a:pPr>
+              <a:spcAft>
+                <a:spcPts val="600"/>
+              </a:spcAft>
+            </a:pPr>
+            <a:r>
+              <a:rPr sz="1500">
+                <a:solidFill>
+                  <a:srgbClr val="22282E"/>
+                </a:solidFill>
+              </a:rPr>
+              <a:t>•  MFA resistente a phishing: factores no interceptables (FIDO2/passkeys). Característica: derrotan páginas falsas y proxies AiTM.</a:t>
+            </a:r>
+          </a:p>
+          <a:p>
+            <a:pPr>
+              <a:spcAft>
+                <a:spcPts val="600"/>
+              </a:spcAft>
+            </a:pPr>
+            <a:r>
+              <a:rPr sz="1500">
+                <a:solidFill>
+                  <a:srgbClr val="22282E"/>
+                </a:solidFill>
+              </a:rPr>
+              <a:t>•  Sandboxing de adjuntos/URL: detonación en entorno aislado. Característica: detecta payloads antes del usuario.</a:t>
+            </a:r>
+          </a:p>
+          <a:p>
+            <a:pPr>
+              <a:spcAft>
+                <a:spcPts val="600"/>
+              </a:spcAft>
+            </a:pPr>
+            <a:r>
+              <a:rPr sz="1500">
+                <a:solidFill>
+                  <a:srgbClr val="22282E"/>
+                </a:solidFill>
+              </a:rPr>
+              <a:t>•  Verificación fuera de banda: confirmar por un canal distinto al de la petición. Característica: frustra pretextos urgentes.</a:t>
+            </a:r>
+          </a:p>
+          <a:p>
+            <a:pPr>
+              <a:spcAft>
+                <a:spcPts val="600"/>
+              </a:spcAft>
+            </a:pPr>
+            <a:r>
+              <a:rPr sz="1500">
+                <a:solidFill>
+                  <a:srgbClr val="22282E"/>
+                </a:solidFill>
+              </a:rPr>
+              <a:t>•  Tasa de reporte: proporción de usuarios que reportan un correo sospechoso. Característica: indicador clave de cultura.</a:t>
+            </a:r>
+          </a:p>
+          <a:p>
+            <a:pPr>
+              <a:spcAft>
+                <a:spcPts val="600"/>
+              </a:spcAft>
+            </a:pPr>
+            <a:r>
+              <a:rPr sz="1500">
+                <a:solidFill>
+                  <a:srgbClr val="22282E"/>
+                </a:solidFill>
+              </a:rPr>
+              <a:t>•  Playbook de respuesta: guía de acciones ante un incidente. Característica: reduce el tiempo de contención.</a:t>
             </a:r>
           </a:p>
         </p:txBody>
@@ -4808,7 +5304,7 @@
                   <a:srgbClr val="0B3D2E"/>
                 </a:solidFill>
               </a:rPr>
-              <a:t>📝 Reto verificable</a:t>
+              <a:t>🧰 Herramientas y preparación</a:t>
             </a:r>
           </a:p>
         </p:txBody>
@@ -4846,67 +5342,67 @@
                   <a:srgbClr val="22282E"/>
                 </a:solidFill>
               </a:rPr>
-              <a:t>•  Entrega un plan de defensa contra ingeniería social que cubra: autenticación de correo, MFA</a:t>
-            </a:r>
-          </a:p>
-          <a:p>
-            <a:pPr>
-              <a:spcAft>
-                <a:spcPts val="600"/>
-              </a:spcAft>
-            </a:pPr>
-            <a:r>
-              <a:rPr sz="1500">
-                <a:solidFill>
-                  <a:srgbClr val="22282E"/>
-                </a:solidFill>
-              </a:rPr>
-              <a:t>•  resistente, verificación de identidad, programa de concienciación con métricas y playbook de</a:t>
-            </a:r>
-          </a:p>
-          <a:p>
-            <a:pPr>
-              <a:spcAft>
-                <a:spcPts val="600"/>
-              </a:spcAft>
-            </a:pPr>
-            <a:r>
-              <a:rPr sz="1500">
-                <a:solidFill>
-                  <a:srgbClr val="22282E"/>
-                </a:solidFill>
-              </a:rPr>
-              <a:t>•  respuesta.</a:t>
-            </a:r>
-          </a:p>
-          <a:p>
-            <a:pPr>
-              <a:spcAft>
-                <a:spcPts val="600"/>
-              </a:spcAft>
-            </a:pPr>
-            <a:r>
-              <a:rPr sz="1500">
-                <a:solidFill>
-                  <a:srgbClr val="22282E"/>
-                </a:solidFill>
-              </a:rPr>
-              <a:t>•  Criterio de aceptación: el plan incluye configuración DMARC verificable, al menos un control por</a:t>
-            </a:r>
-          </a:p>
-          <a:p>
-            <a:pPr>
-              <a:spcAft>
-                <a:spcPts val="600"/>
-              </a:spcAft>
-            </a:pPr>
-            <a:r>
-              <a:rPr sz="1500">
-                <a:solidFill>
-                  <a:srgbClr val="22282E"/>
-                </a:solidFill>
-              </a:rPr>
-              <a:t>•  cada vector (phishing, vishing, pretexting) y métricas que midan resiliencia, no solo víctimas.</a:t>
+              <a:t>•  Correo: registros DNS SPF/DKIM/DMARC; analizadores como MXToolbox o dig.</a:t>
+            </a:r>
+          </a:p>
+          <a:p>
+            <a:pPr>
+              <a:spcAft>
+                <a:spcPts val="600"/>
+              </a:spcAft>
+            </a:pPr>
+            <a:r>
+              <a:rPr sz="1500">
+                <a:solidFill>
+                  <a:srgbClr val="22282E"/>
+                </a:solidFill>
+              </a:rPr>
+              <a:t>•  MFA: llaves FIDO2/passkeys; políticas de acceso condicional.</a:t>
+            </a:r>
+          </a:p>
+          <a:p>
+            <a:pPr>
+              <a:spcAft>
+                <a:spcPts val="600"/>
+              </a:spcAft>
+            </a:pPr>
+            <a:r>
+              <a:rPr sz="1500">
+                <a:solidFill>
+                  <a:srgbClr val="22282E"/>
+                </a:solidFill>
+              </a:rPr>
+              <a:t>•  Filtrado: pasarela de correo con sandboxing y reescritura de URL.</a:t>
+            </a:r>
+          </a:p>
+          <a:p>
+            <a:pPr>
+              <a:spcAft>
+                <a:spcPts val="600"/>
+              </a:spcAft>
+            </a:pPr>
+            <a:r>
+              <a:rPr sz="1500">
+                <a:solidFill>
+                  <a:srgbClr val="22282E"/>
+                </a:solidFill>
+              </a:rPr>
+              <a:t>•  Reporte: botón "Reportar phishing" integrado en el cliente de correo.</a:t>
+            </a:r>
+          </a:p>
+          <a:p>
+            <a:pPr>
+              <a:spcAft>
+                <a:spcPts val="600"/>
+              </a:spcAft>
+            </a:pPr>
+            <a:r>
+              <a:rPr sz="1500">
+                <a:solidFill>
+                  <a:srgbClr val="22282E"/>
+                </a:solidFill>
+              </a:rPr>
+              <a:t>•  Formación: plataforma de awareness con simulacros (enlaza con GoPhish, Clase 258).</a:t>
             </a:r>
           </a:p>
         </p:txBody>
